--- a/svaly.pptx
+++ b/svaly.pptx
@@ -5,7 +5,7 @@
     <p:sldMasterId id="2147483648" r:id="rId1"/>
   </p:sldMasterIdLst>
   <p:notesMasterIdLst>
-    <p:notesMasterId r:id="rId12"/>
+    <p:notesMasterId r:id="rId13"/>
   </p:notesMasterIdLst>
   <p:sldIdLst>
     <p:sldId id="256" r:id="rId2"/>
@@ -17,7 +17,8 @@
     <p:sldId id="262" r:id="rId8"/>
     <p:sldId id="263" r:id="rId9"/>
     <p:sldId id="264" r:id="rId10"/>
-    <p:sldId id="265" r:id="rId11"/>
+    <p:sldId id="266" r:id="rId11"/>
+    <p:sldId id="265" r:id="rId12"/>
   </p:sldIdLst>
   <p:sldSz cx="12192000" cy="6858000"/>
   <p:notesSz cx="6858000" cy="9144000"/>
@@ -116,13 +117,18 @@
       </a:defRPr>
     </a:lvl9pPr>
   </p:defaultTextStyle>
+  <p:extLst>
+    <p:ext uri="{EFAFB233-063F-42B5-8137-9DF3F51BA10A}">
+      <p15:sldGuideLst xmlns:p15="http://schemas.microsoft.com/office/powerpoint/2012/main"/>
+    </p:ext>
+  </p:extLst>
 </p:presentation>
 </file>
 
 <file path=ppt/revisionInfo.xml><?xml version="1.0" encoding="utf-8"?>
 <p1510:revInfo xmlns:a="http://schemas.openxmlformats.org/drawingml/2006/main" xmlns:r="http://schemas.openxmlformats.org/officeDocument/2006/relationships" xmlns:p1510="http://schemas.microsoft.com/office/powerpoint/2015/10/main">
   <p1510:revLst>
-    <p1510:client id="{93F74A5F-CD2B-48E8-A7B3-9120C8D310C8}" v="553" dt="2026-02-10T15:31:47.750"/>
+    <p1510:client id="{93F74A5F-CD2B-48E8-A7B3-9120C8D310C8}" v="557" dt="2026-02-10T18:30:38.231"/>
   </p1510:revLst>
 </p1510:revInfo>
 </file>
@@ -132,7 +138,7 @@
   <pc:docChgLst>
     <pc:chgData name="Dušan Brozman" userId="8ff6f0f7c8daa242" providerId="LiveId" clId="{6BA6992C-F62E-46DF-90A2-1BD46E9E45BB}"/>
     <pc:docChg chg="undo redo custSel addSld delSld modSld">
-      <pc:chgData name="Dušan Brozman" userId="8ff6f0f7c8daa242" providerId="LiveId" clId="{6BA6992C-F62E-46DF-90A2-1BD46E9E45BB}" dt="2026-02-10T15:31:47.750" v="1161"/>
+      <pc:chgData name="Dušan Brozman" userId="8ff6f0f7c8daa242" providerId="LiveId" clId="{6BA6992C-F62E-46DF-90A2-1BD46E9E45BB}" dt="2026-02-10T18:30:38.231" v="1568"/>
       <pc:docMkLst>
         <pc:docMk/>
       </pc:docMkLst>
@@ -1130,6 +1136,85 @@
             <pc:docMk/>
             <pc:sldMk cId="2986384011" sldId="265"/>
             <ac:picMk id="10242" creationId="{2902778D-9D21-CB58-C299-249AB063B37D}"/>
+          </ac:picMkLst>
+        </pc:picChg>
+      </pc:sldChg>
+      <pc:sldChg chg="addSp delSp modSp new mod modTransition">
+        <pc:chgData name="Dušan Brozman" userId="8ff6f0f7c8daa242" providerId="LiveId" clId="{6BA6992C-F62E-46DF-90A2-1BD46E9E45BB}" dt="2026-02-10T18:30:38.231" v="1568"/>
+        <pc:sldMkLst>
+          <pc:docMk/>
+          <pc:sldMk cId="2994730494" sldId="266"/>
+        </pc:sldMkLst>
+        <pc:spChg chg="mod">
+          <ac:chgData name="Dušan Brozman" userId="8ff6f0f7c8daa242" providerId="LiveId" clId="{6BA6992C-F62E-46DF-90A2-1BD46E9E45BB}" dt="2026-02-10T18:28:38.022" v="1567" actId="1076"/>
+          <ac:spMkLst>
+            <pc:docMk/>
+            <pc:sldMk cId="2994730494" sldId="266"/>
+            <ac:spMk id="2" creationId="{AAD44675-1F32-E248-C042-D4B465C7BF90}"/>
+          </ac:spMkLst>
+        </pc:spChg>
+        <pc:spChg chg="mod">
+          <ac:chgData name="Dušan Brozman" userId="8ff6f0f7c8daa242" providerId="LiveId" clId="{6BA6992C-F62E-46DF-90A2-1BD46E9E45BB}" dt="2026-02-10T18:28:38.022" v="1567" actId="1076"/>
+          <ac:spMkLst>
+            <pc:docMk/>
+            <pc:sldMk cId="2994730494" sldId="266"/>
+            <ac:spMk id="3" creationId="{902AE869-FC8E-1851-8BD6-CF5C802ABEC7}"/>
+          </ac:spMkLst>
+        </pc:spChg>
+        <pc:spChg chg="add del mod">
+          <ac:chgData name="Dušan Brozman" userId="8ff6f0f7c8daa242" providerId="LiveId" clId="{6BA6992C-F62E-46DF-90A2-1BD46E9E45BB}" dt="2026-02-10T18:24:59.425" v="1165" actId="21"/>
+          <ac:spMkLst>
+            <pc:docMk/>
+            <pc:sldMk cId="2994730494" sldId="266"/>
+            <ac:spMk id="4" creationId="{E67DE419-8F71-0677-8455-4F4BF5FA9619}"/>
+          </ac:spMkLst>
+        </pc:spChg>
+        <pc:spChg chg="add mod">
+          <ac:chgData name="Dušan Brozman" userId="8ff6f0f7c8daa242" providerId="LiveId" clId="{6BA6992C-F62E-46DF-90A2-1BD46E9E45BB}" dt="2026-02-10T18:24:52.659" v="1163"/>
+          <ac:spMkLst>
+            <pc:docMk/>
+            <pc:sldMk cId="2994730494" sldId="266"/>
+            <ac:spMk id="6" creationId="{9D7E064E-AAA4-7AE1-3A79-221950768C47}"/>
+          </ac:spMkLst>
+        </pc:spChg>
+        <pc:spChg chg="add mod">
+          <ac:chgData name="Dušan Brozman" userId="8ff6f0f7c8daa242" providerId="LiveId" clId="{6BA6992C-F62E-46DF-90A2-1BD46E9E45BB}" dt="2026-02-10T18:24:52.659" v="1163"/>
+          <ac:spMkLst>
+            <pc:docMk/>
+            <pc:sldMk cId="2994730494" sldId="266"/>
+            <ac:spMk id="8" creationId="{A2083944-8301-4038-5C92-1D19E7C95757}"/>
+          </ac:spMkLst>
+        </pc:spChg>
+        <pc:spChg chg="add mod">
+          <ac:chgData name="Dušan Brozman" userId="8ff6f0f7c8daa242" providerId="LiveId" clId="{6BA6992C-F62E-46DF-90A2-1BD46E9E45BB}" dt="2026-02-10T18:24:52.659" v="1163"/>
+          <ac:spMkLst>
+            <pc:docMk/>
+            <pc:sldMk cId="2994730494" sldId="266"/>
+            <ac:spMk id="9" creationId="{1939FCF4-38CE-695F-BE06-7DFD30304707}"/>
+          </ac:spMkLst>
+        </pc:spChg>
+        <pc:spChg chg="add mod">
+          <ac:chgData name="Dušan Brozman" userId="8ff6f0f7c8daa242" providerId="LiveId" clId="{6BA6992C-F62E-46DF-90A2-1BD46E9E45BB}" dt="2026-02-10T18:24:52.659" v="1163"/>
+          <ac:spMkLst>
+            <pc:docMk/>
+            <pc:sldMk cId="2994730494" sldId="266"/>
+            <ac:spMk id="10" creationId="{024AF609-C560-D10D-799F-017604C3BE83}"/>
+          </ac:spMkLst>
+        </pc:spChg>
+        <pc:picChg chg="add del mod">
+          <ac:chgData name="Dušan Brozman" userId="8ff6f0f7c8daa242" providerId="LiveId" clId="{6BA6992C-F62E-46DF-90A2-1BD46E9E45BB}" dt="2026-02-10T18:24:54.958" v="1164" actId="21"/>
+          <ac:picMkLst>
+            <pc:docMk/>
+            <pc:sldMk cId="2994730494" sldId="266"/>
+            <ac:picMk id="5" creationId="{E7B35FD7-E16A-5B33-A278-E0D6ED0FCC20}"/>
+          </ac:picMkLst>
+        </pc:picChg>
+        <pc:picChg chg="add mod">
+          <ac:chgData name="Dušan Brozman" userId="8ff6f0f7c8daa242" providerId="LiveId" clId="{6BA6992C-F62E-46DF-90A2-1BD46E9E45BB}" dt="2026-02-10T18:24:52.659" v="1163"/>
+          <ac:picMkLst>
+            <pc:docMk/>
+            <pc:sldMk cId="2994730494" sldId="266"/>
+            <ac:picMk id="7" creationId="{12AEACCC-43CD-0468-1222-108CA56654E7}"/>
           </ac:picMkLst>
         </pc:picChg>
       </pc:sldChg>
@@ -5600,13 +5685,13 @@
   <p:clrMapOvr>
     <a:masterClrMapping/>
   </p:clrMapOvr>
-  <mc:AlternateContent xmlns:mc="http://schemas.openxmlformats.org/markup-compatibility/2006">
-    <mc:Choice xmlns:p15="http://schemas.microsoft.com/office/powerpoint/2012/main" Requires="p15">
+  <mc:AlternateContent xmlns:mc="http://schemas.openxmlformats.org/markup-compatibility/2006" xmlns:p15="http://schemas.microsoft.com/office/powerpoint/2012/main">
+    <mc:Choice Requires="p15">
       <p:transition xmlns:p14="http://schemas.microsoft.com/office/powerpoint/2010/main" spd="slow" p14:dur="1250">
         <p15:prstTrans prst="peelOff"/>
       </p:transition>
     </mc:Choice>
-    <mc:Fallback>
+    <mc:Fallback xmlns="">
       <p:transition spd="slow">
         <p:fade/>
       </p:transition>
@@ -5821,6 +5906,479 @@
 <file path=ppt/slides/slide10.xml><?xml version="1.0" encoding="utf-8"?>
 <p:sld xmlns:a="http://schemas.openxmlformats.org/drawingml/2006/main" xmlns:r="http://schemas.openxmlformats.org/officeDocument/2006/relationships" xmlns:p="http://schemas.openxmlformats.org/presentationml/2006/main">
   <p:cSld>
+    <p:spTree>
+      <p:nvGrpSpPr>
+        <p:cNvPr id="1" name=""/>
+        <p:cNvGrpSpPr/>
+        <p:nvPr/>
+      </p:nvGrpSpPr>
+      <p:grpSpPr>
+        <a:xfrm>
+          <a:off x="0" y="0"/>
+          <a:ext cx="0" cy="0"/>
+          <a:chOff x="0" y="0"/>
+          <a:chExt cx="0" cy="0"/>
+        </a:xfrm>
+      </p:grpSpPr>
+      <p:sp>
+        <p:nvSpPr>
+          <p:cNvPr id="2" name="Nadpis 1">
+            <a:extLst>
+              <a:ext uri="{FF2B5EF4-FFF2-40B4-BE49-F238E27FC236}">
+                <a16:creationId xmlns:a16="http://schemas.microsoft.com/office/drawing/2014/main" id="{AAD44675-1F32-E248-C042-D4B465C7BF90}"/>
+              </a:ext>
+            </a:extLst>
+          </p:cNvPr>
+          <p:cNvSpPr>
+            <a:spLocks noGrp="1"/>
+          </p:cNvSpPr>
+          <p:nvPr>
+            <p:ph type="title"/>
+          </p:nvPr>
+        </p:nvSpPr>
+        <p:spPr>
+          <a:xfrm>
+            <a:off x="838200" y="1309022"/>
+            <a:ext cx="10515600" cy="1325563"/>
+          </a:xfrm>
+        </p:spPr>
+        <p:txBody>
+          <a:bodyPr/>
+          <a:lstStyle/>
+          <a:p>
+            <a:pPr algn="ctr"/>
+            <a:r>
+              <a:rPr lang="en-US" b="1">
+                <a:solidFill>
+                  <a:srgbClr val="E07720"/>
+                </a:solidFill>
+              </a:rPr>
+              <a:t>Zdroje</a:t>
+            </a:r>
+            <a:endParaRPr lang="sk-SK" b="1">
+              <a:solidFill>
+                <a:srgbClr val="E07720"/>
+              </a:solidFill>
+            </a:endParaRPr>
+          </a:p>
+        </p:txBody>
+      </p:sp>
+      <p:sp>
+        <p:nvSpPr>
+          <p:cNvPr id="3" name="Zástupný objekt pre obsah 2">
+            <a:extLst>
+              <a:ext uri="{FF2B5EF4-FFF2-40B4-BE49-F238E27FC236}">
+                <a16:creationId xmlns:a16="http://schemas.microsoft.com/office/drawing/2014/main" id="{902AE869-FC8E-1851-8BD6-CF5C802ABEC7}"/>
+              </a:ext>
+            </a:extLst>
+          </p:cNvPr>
+          <p:cNvSpPr>
+            <a:spLocks noGrp="1"/>
+          </p:cNvSpPr>
+          <p:nvPr>
+            <p:ph idx="1"/>
+          </p:nvPr>
+        </p:nvSpPr>
+        <p:spPr>
+          <a:xfrm>
+            <a:off x="838200" y="2769522"/>
+            <a:ext cx="10515600" cy="4351338"/>
+          </a:xfrm>
+        </p:spPr>
+        <p:txBody>
+          <a:bodyPr>
+            <a:normAutofit/>
+          </a:bodyPr>
+          <a:lstStyle/>
+          <a:p>
+            <a:r>
+              <a:rPr lang="en-US" sz="2400"/>
+              <a:t>GUYTON, A.C.; HALL, J. E. Textbook of Medical Physiology. Elsevier, 2021.</a:t>
+            </a:r>
+          </a:p>
+          <a:p>
+            <a:r>
+              <a:rPr lang="en-US" sz="2400"/>
+              <a:t>BERNE, R. M.; LEVY, M. N. Principles of Physiology. Elsevier, 2018.</a:t>
+            </a:r>
+          </a:p>
+          <a:p>
+            <a:r>
+              <a:rPr lang="en-US" sz="2400"/>
+              <a:t>OpenStax. Anatomy &amp; Physiology. </a:t>
+            </a:r>
+            <a:r>
+              <a:rPr lang="en-US" sz="2400" u="sng">
+                <a:solidFill>
+                  <a:srgbClr val="E07720"/>
+                </a:solidFill>
+                <a:hlinkClick r:id="rId2">
+                  <a:extLst>
+                    <a:ext uri="{A12FA001-AC4F-418D-AE19-62706E023703}">
+                      <ahyp:hlinkClr xmlns:ahyp="http://schemas.microsoft.com/office/drawing/2018/hyperlinkcolor" val="tx"/>
+                    </a:ext>
+                  </a:extLst>
+                </a:hlinkClick>
+              </a:rPr>
+              <a:t>https://openstax.org/details/books/anatomy-and-physiologys</a:t>
+            </a:r>
+            <a:endParaRPr lang="en-US" sz="2400" u="sng">
+              <a:solidFill>
+                <a:srgbClr val="E07720"/>
+              </a:solidFill>
+            </a:endParaRPr>
+          </a:p>
+          <a:p>
+            <a:r>
+              <a:rPr lang="en-US" sz="2400"/>
+              <a:t>Khan Academy – Muscle contraction and ATP. </a:t>
+            </a:r>
+            <a:r>
+              <a:rPr lang="en-US" sz="2400" u="sng">
+                <a:solidFill>
+                  <a:srgbClr val="E07720"/>
+                </a:solidFill>
+              </a:rPr>
+              <a:t>https://www.khanacademy.org/science/biology/human-biology/muscles</a:t>
+            </a:r>
+            <a:endParaRPr lang="sk-SK" sz="2400" u="sng">
+              <a:solidFill>
+                <a:srgbClr val="E07720"/>
+              </a:solidFill>
+            </a:endParaRPr>
+          </a:p>
+        </p:txBody>
+      </p:sp>
+      <p:sp>
+        <p:nvSpPr>
+          <p:cNvPr id="6" name="Obdĺžnik 5">
+            <a:extLst>
+              <a:ext uri="{FF2B5EF4-FFF2-40B4-BE49-F238E27FC236}">
+                <a16:creationId xmlns:a16="http://schemas.microsoft.com/office/drawing/2014/main" id="{9D7E064E-AAA4-7AE1-3A79-221950768C47}"/>
+              </a:ext>
+            </a:extLst>
+          </p:cNvPr>
+          <p:cNvSpPr/>
+          <p:nvPr/>
+        </p:nvSpPr>
+        <p:spPr>
+          <a:xfrm>
+            <a:off x="2712096" y="0"/>
+            <a:ext cx="9479904" cy="542091"/>
+          </a:xfrm>
+          <a:prstGeom prst="rect">
+            <a:avLst/>
+          </a:prstGeom>
+          <a:gradFill flip="none" rotWithShape="1">
+            <a:gsLst>
+              <a:gs pos="0">
+                <a:schemeClr val="accent1">
+                  <a:tint val="66000"/>
+                  <a:satMod val="160000"/>
+                </a:schemeClr>
+              </a:gs>
+              <a:gs pos="0">
+                <a:schemeClr val="accent3">
+                  <a:lumMod val="20000"/>
+                  <a:lumOff val="80000"/>
+                </a:schemeClr>
+              </a:gs>
+              <a:gs pos="100000">
+                <a:schemeClr val="bg1"/>
+              </a:gs>
+            </a:gsLst>
+            <a:lin ang="10800000" scaled="1"/>
+            <a:tileRect/>
+          </a:gradFill>
+          <a:ln>
+            <a:noFill/>
+          </a:ln>
+        </p:spPr>
+        <p:style>
+          <a:lnRef idx="2">
+            <a:schemeClr val="accent1">
+              <a:shade val="15000"/>
+            </a:schemeClr>
+          </a:lnRef>
+          <a:fillRef idx="1">
+            <a:schemeClr val="accent1"/>
+          </a:fillRef>
+          <a:effectRef idx="0">
+            <a:schemeClr val="accent1"/>
+          </a:effectRef>
+          <a:fontRef idx="minor">
+            <a:schemeClr val="lt1"/>
+          </a:fontRef>
+        </p:style>
+        <p:txBody>
+          <a:bodyPr rtlCol="0" anchor="ctr"/>
+          <a:lstStyle/>
+          <a:p>
+            <a:pPr algn="ctr"/>
+            <a:endParaRPr lang="sk-SK"/>
+          </a:p>
+        </p:txBody>
+      </p:sp>
+      <p:pic>
+        <p:nvPicPr>
+          <p:cNvPr id="7" name="Picture 4" descr="10 zaujímavých faktov o ľudských svaloch | kulturistika.com">
+            <a:extLst>
+              <a:ext uri="{FF2B5EF4-FFF2-40B4-BE49-F238E27FC236}">
+                <a16:creationId xmlns:a16="http://schemas.microsoft.com/office/drawing/2014/main" id="{12AEACCC-43CD-0468-1222-108CA56654E7}"/>
+              </a:ext>
+            </a:extLst>
+          </p:cNvPr>
+          <p:cNvPicPr>
+            <a:picLocks noChangeAspect="1" noChangeArrowheads="1"/>
+          </p:cNvPicPr>
+          <p:nvPr/>
+        </p:nvPicPr>
+        <p:blipFill rotWithShape="1">
+          <a:blip r:embed="rId3">
+            <a:extLst>
+              <a:ext uri="{28A0092B-C50C-407E-A947-70E740481C1C}">
+                <a14:useLocalDpi xmlns:a14="http://schemas.microsoft.com/office/drawing/2010/main" val="0"/>
+              </a:ext>
+            </a:extLst>
+          </a:blip>
+          <a:srcRect t="37287" b="12119"/>
+          <a:stretch>
+            <a:fillRect/>
+          </a:stretch>
+        </p:blipFill>
+        <p:spPr bwMode="auto">
+          <a:xfrm>
+            <a:off x="184011" y="1"/>
+            <a:ext cx="2639575" cy="542090"/>
+          </a:xfrm>
+          <a:prstGeom prst="rect">
+            <a:avLst/>
+          </a:prstGeom>
+          <a:noFill/>
+          <a:extLst>
+            <a:ext uri="{909E8E84-426E-40DD-AFC4-6F175D3DCCD1}">
+              <a14:hiddenFill xmlns:a14="http://schemas.microsoft.com/office/drawing/2010/main">
+                <a:solidFill>
+                  <a:srgbClr val="FFFFFF"/>
+                </a:solidFill>
+              </a14:hiddenFill>
+            </a:ext>
+          </a:extLst>
+        </p:spPr>
+      </p:pic>
+      <p:sp>
+        <p:nvSpPr>
+          <p:cNvPr id="8" name="Obdĺžnik 7">
+            <a:extLst>
+              <a:ext uri="{FF2B5EF4-FFF2-40B4-BE49-F238E27FC236}">
+                <a16:creationId xmlns:a16="http://schemas.microsoft.com/office/drawing/2014/main" id="{A2083944-8301-4038-5C92-1D19E7C95757}"/>
+              </a:ext>
+            </a:extLst>
+          </p:cNvPr>
+          <p:cNvSpPr/>
+          <p:nvPr/>
+        </p:nvSpPr>
+        <p:spPr>
+          <a:xfrm>
+            <a:off x="0" y="542091"/>
+            <a:ext cx="12192000" cy="178300"/>
+          </a:xfrm>
+          <a:prstGeom prst="rect">
+            <a:avLst/>
+          </a:prstGeom>
+          <a:gradFill flip="none" rotWithShape="1">
+            <a:gsLst>
+              <a:gs pos="0">
+                <a:schemeClr val="accent3">
+                  <a:lumMod val="20000"/>
+                  <a:lumOff val="80000"/>
+                </a:schemeClr>
+              </a:gs>
+              <a:gs pos="0">
+                <a:schemeClr val="accent3">
+                  <a:lumMod val="20000"/>
+                  <a:lumOff val="80000"/>
+                </a:schemeClr>
+              </a:gs>
+              <a:gs pos="100000">
+                <a:schemeClr val="bg1"/>
+              </a:gs>
+            </a:gsLst>
+            <a:lin ang="5400000" scaled="1"/>
+            <a:tileRect/>
+          </a:gradFill>
+          <a:ln>
+            <a:noFill/>
+          </a:ln>
+        </p:spPr>
+        <p:style>
+          <a:lnRef idx="2">
+            <a:schemeClr val="accent1">
+              <a:shade val="15000"/>
+            </a:schemeClr>
+          </a:lnRef>
+          <a:fillRef idx="1">
+            <a:schemeClr val="accent1"/>
+          </a:fillRef>
+          <a:effectRef idx="0">
+            <a:schemeClr val="accent1"/>
+          </a:effectRef>
+          <a:fontRef idx="minor">
+            <a:schemeClr val="lt1"/>
+          </a:fontRef>
+        </p:style>
+        <p:txBody>
+          <a:bodyPr rtlCol="0" anchor="ctr"/>
+          <a:lstStyle/>
+          <a:p>
+            <a:pPr algn="ctr"/>
+            <a:endParaRPr lang="sk-SK">
+              <a:solidFill>
+                <a:schemeClr val="bg1">
+                  <a:lumMod val="50000"/>
+                </a:schemeClr>
+              </a:solidFill>
+            </a:endParaRPr>
+          </a:p>
+        </p:txBody>
+      </p:sp>
+      <p:sp>
+        <p:nvSpPr>
+          <p:cNvPr id="9" name="BlokTextu 8">
+            <a:extLst>
+              <a:ext uri="{FF2B5EF4-FFF2-40B4-BE49-F238E27FC236}">
+                <a16:creationId xmlns:a16="http://schemas.microsoft.com/office/drawing/2014/main" id="{1939FCF4-38CE-695F-BE06-7DFD30304707}"/>
+              </a:ext>
+            </a:extLst>
+          </p:cNvPr>
+          <p:cNvSpPr txBox="1"/>
+          <p:nvPr/>
+        </p:nvSpPr>
+        <p:spPr>
+          <a:xfrm>
+            <a:off x="0" y="101769"/>
+            <a:ext cx="12192000" cy="338554"/>
+          </a:xfrm>
+          <a:prstGeom prst="rect">
+            <a:avLst/>
+          </a:prstGeom>
+          <a:noFill/>
+        </p:spPr>
+        <p:txBody>
+          <a:bodyPr wrap="square" rtlCol="0">
+            <a:spAutoFit/>
+          </a:bodyPr>
+          <a:lstStyle/>
+          <a:p>
+            <a:pPr algn="ctr"/>
+            <a:r>
+              <a:rPr lang="sk-SK" sz="1600">
+                <a:solidFill>
+                  <a:srgbClr val="E07720"/>
+                </a:solidFill>
+              </a:rPr>
+              <a:t>SVALY, BIELKOVINY A BUDOVANIE SVALOVEJ HMOTY</a:t>
+            </a:r>
+          </a:p>
+        </p:txBody>
+      </p:sp>
+      <p:sp>
+        <p:nvSpPr>
+          <p:cNvPr id="10" name="Obdĺžnik 9">
+            <a:extLst>
+              <a:ext uri="{FF2B5EF4-FFF2-40B4-BE49-F238E27FC236}">
+                <a16:creationId xmlns:a16="http://schemas.microsoft.com/office/drawing/2014/main" id="{024AF609-C560-D10D-799F-017604C3BE83}"/>
+              </a:ext>
+            </a:extLst>
+          </p:cNvPr>
+          <p:cNvSpPr/>
+          <p:nvPr/>
+        </p:nvSpPr>
+        <p:spPr>
+          <a:xfrm>
+            <a:off x="0" y="6587836"/>
+            <a:ext cx="12192000" cy="269399"/>
+          </a:xfrm>
+          <a:prstGeom prst="rect">
+            <a:avLst/>
+          </a:prstGeom>
+          <a:gradFill flip="none" rotWithShape="1">
+            <a:gsLst>
+              <a:gs pos="0">
+                <a:schemeClr val="accent3">
+                  <a:lumMod val="40000"/>
+                  <a:lumOff val="60000"/>
+                  <a:tint val="66000"/>
+                  <a:satMod val="160000"/>
+                </a:schemeClr>
+              </a:gs>
+              <a:gs pos="0">
+                <a:schemeClr val="accent3">
+                  <a:lumMod val="20000"/>
+                  <a:lumOff val="80000"/>
+                </a:schemeClr>
+              </a:gs>
+              <a:gs pos="100000">
+                <a:schemeClr val="bg1"/>
+              </a:gs>
+            </a:gsLst>
+            <a:lin ang="16200000" scaled="1"/>
+            <a:tileRect/>
+          </a:gradFill>
+          <a:ln>
+            <a:noFill/>
+          </a:ln>
+        </p:spPr>
+        <p:style>
+          <a:lnRef idx="2">
+            <a:schemeClr val="accent1">
+              <a:shade val="15000"/>
+            </a:schemeClr>
+          </a:lnRef>
+          <a:fillRef idx="1">
+            <a:schemeClr val="accent1"/>
+          </a:fillRef>
+          <a:effectRef idx="0">
+            <a:schemeClr val="accent1"/>
+          </a:effectRef>
+          <a:fontRef idx="minor">
+            <a:schemeClr val="lt1"/>
+          </a:fontRef>
+        </p:style>
+        <p:txBody>
+          <a:bodyPr rtlCol="0" anchor="ctr"/>
+          <a:lstStyle/>
+          <a:p>
+            <a:pPr algn="ctr"/>
+            <a:endParaRPr lang="sk-SK">
+              <a:solidFill>
+                <a:schemeClr val="bg1">
+                  <a:lumMod val="50000"/>
+                </a:schemeClr>
+              </a:solidFill>
+            </a:endParaRPr>
+          </a:p>
+        </p:txBody>
+      </p:sp>
+    </p:spTree>
+    <p:extLst>
+      <p:ext uri="{BB962C8B-B14F-4D97-AF65-F5344CB8AC3E}">
+        <p14:creationId xmlns:p14="http://schemas.microsoft.com/office/powerpoint/2010/main" val="2994730494"/>
+      </p:ext>
+    </p:extLst>
+  </p:cSld>
+  <p:clrMapOvr>
+    <a:masterClrMapping/>
+  </p:clrMapOvr>
+  <p:transition spd="slow">
+    <p:push dir="u"/>
+  </p:transition>
+</p:sld>
+</file>
+
+<file path=ppt/slides/slide11.xml><?xml version="1.0" encoding="utf-8"?>
+<p:sld xmlns:a="http://schemas.openxmlformats.org/drawingml/2006/main" xmlns:r="http://schemas.openxmlformats.org/officeDocument/2006/relationships" xmlns:p="http://schemas.openxmlformats.org/presentationml/2006/main">
+  <p:cSld>
     <p:bg>
       <p:bgPr>
         <a:gradFill flip="none" rotWithShape="1">
@@ -6430,13 +6988,13 @@
   <p:clrMapOvr>
     <a:masterClrMapping/>
   </p:clrMapOvr>
-  <mc:AlternateContent xmlns:mc="http://schemas.openxmlformats.org/markup-compatibility/2006">
-    <mc:Choice xmlns:p15="http://schemas.microsoft.com/office/powerpoint/2012/main" Requires="p15">
+  <mc:AlternateContent xmlns:mc="http://schemas.openxmlformats.org/markup-compatibility/2006" xmlns:p15="http://schemas.microsoft.com/office/powerpoint/2012/main">
+    <mc:Choice Requires="p15">
       <p:transition xmlns:p14="http://schemas.microsoft.com/office/powerpoint/2010/main" spd="slow" p14:dur="2000">
         <p15:prstTrans prst="prestige"/>
       </p:transition>
     </mc:Choice>
-    <mc:Fallback>
+    <mc:Fallback xmlns="">
       <p:transition spd="slow">
         <p:fade/>
       </p:transition>
